--- a/examples/repositories/hands-on-deck/deck.pptx
+++ b/examples/repositories/hands-on-deck/deck.pptx
@@ -540,7 +540,7 @@
           <a:lstStyle/>
           <a:p>
             <a:r>
-              <a:t>既存の企画資料を公開前の確認手順へ編集した作例です。実在の運用実績や公開済みという意味ではありません。</a:t>
+              <a:t>来訪者が案内を見つけ、日時・場所を確かめ、迷わず会場へ行くという3行動を想定し、必要な情報が原稿にあるか公開前に点検する架空の案です。右の図は点検担当者の作業順ではなく、案内を読む人の行動です。運用・公開・利用者テストは未実施です。</a:t>
             </a:r>
           </a:p>
         </p:txBody>
@@ -4580,7 +4580,7 @@
                 </a:solidFill>
                 <a:latin typeface="Yu Gothic"/>
               </a:rPr>
-              <a:t>こもれび商店街｜運用のたたき台</a:t>
+              <a:t>来訪者の行動を、点検の基準にする</a:t>
             </a:r>
             <a:endParaRPr lang="en-US" sz="1900" dirty="0"/>
           </a:p>
@@ -5037,8 +5037,8 @@
         </p:nvSpPr>
         <p:spPr>
           <a:xfrm>
-            <a:off x="495834" y="5298370"/>
-            <a:ext cx="11214610" cy="3644"/>
+            <a:off x="594360" y="5916168"/>
+            <a:ext cx="11000232" cy="914"/>
           </a:xfrm>
           <a:prstGeom prst="line">
             <a:avLst/>
@@ -5064,8 +5064,8 @@
         </p:nvSpPr>
         <p:spPr>
           <a:xfrm>
-            <a:off x="2260422" y="5575313"/>
-            <a:ext cx="7947935" cy="539311"/>
+            <a:off x="594360" y="5989320"/>
+            <a:ext cx="10972800" cy="384048"/>
           </a:xfrm>
           <a:prstGeom prst="rect">
             <a:avLst/>
@@ -5081,13 +5081,13 @@
               <a:buNone/>
             </a:pPr>
             <a:r>
-              <a:rPr sz="2800">
+              <a:rPr sz="2200">
                 <a:solidFill>
                   <a:srgbClr val="9A5A2E"/>
                 </a:solidFill>
                 <a:latin typeface="Yu Mincho"/>
               </a:rPr>
-              <a:t>公開前の確認と、変更時の連絡をそろえる。</a:t>
+              <a:t>3つの行動を支える情報を、公開前に確認する。</a:t>
             </a:r>
             <a:endParaRPr lang="en-US" sz="2800" dirty="0"/>
           </a:p>
@@ -5101,8 +5101,8 @@
         </p:nvSpPr>
         <p:spPr>
           <a:xfrm>
-            <a:off x="8881271" y="6376993"/>
-            <a:ext cx="2843757" cy="204064"/>
+            <a:off x="594360" y="6492240"/>
+            <a:ext cx="10972800" cy="274320"/>
           </a:xfrm>
           <a:prstGeom prst="rect">
             <a:avLst/>
@@ -5118,7 +5118,7 @@
               <a:buNone/>
             </a:pPr>
             <a:r>
-              <a:rPr sz="1000">
+              <a:rPr sz="1400">
                 <a:solidFill>
                   <a:srgbClr val="76716A"/>
                 </a:solidFill>
@@ -6000,8 +6000,8 @@
         </p:nvSpPr>
         <p:spPr>
           <a:xfrm>
-            <a:off x="291667" y="5859545"/>
-            <a:ext cx="11608361" cy="3644"/>
+            <a:off x="594360" y="5916168"/>
+            <a:ext cx="11000232" cy="914"/>
           </a:xfrm>
           <a:prstGeom prst="line">
             <a:avLst/>
@@ -6027,8 +6027,8 @@
         </p:nvSpPr>
         <p:spPr>
           <a:xfrm>
-            <a:off x="291667" y="6063609"/>
-            <a:ext cx="9406272" cy="451855"/>
+            <a:off x="594360" y="5989320"/>
+            <a:ext cx="10972800" cy="384048"/>
           </a:xfrm>
           <a:prstGeom prst="rect">
             <a:avLst/>
@@ -6044,7 +6044,7 @@
               <a:buNone/>
             </a:pPr>
             <a:r>
-              <a:rPr b="1" sz="2500">
+              <a:rPr b="1" sz="2200">
                 <a:solidFill>
                   <a:srgbClr val="9A5A2E"/>
                 </a:solidFill>
@@ -6064,8 +6064,8 @@
         </p:nvSpPr>
         <p:spPr>
           <a:xfrm>
-            <a:off x="9829190" y="6376993"/>
-            <a:ext cx="2107297" cy="225928"/>
+            <a:off x="594360" y="6492240"/>
+            <a:ext cx="10972800" cy="274320"/>
           </a:xfrm>
           <a:prstGeom prst="rect">
             <a:avLst/>
@@ -6081,7 +6081,7 @@
               <a:buNone/>
             </a:pPr>
             <a:r>
-              <a:rPr sz="800">
+              <a:rPr sz="1400">
                 <a:solidFill>
                   <a:srgbClr val="161616"/>
                 </a:solidFill>
@@ -6279,8 +6279,8 @@
         </p:nvSpPr>
         <p:spPr>
           <a:xfrm>
-            <a:off x="255209" y="1406582"/>
-            <a:ext cx="11688569" cy="757951"/>
+            <a:off x="593628" y="1461576"/>
+            <a:ext cx="11005352" cy="694029"/>
           </a:xfrm>
           <a:prstGeom prst="rect">
             <a:avLst/>
@@ -6310,8 +6310,8 @@
         </p:nvSpPr>
         <p:spPr>
           <a:xfrm>
-            <a:off x="255209" y="1406582"/>
-            <a:ext cx="3646" cy="3797044"/>
+            <a:off x="593628" y="1461576"/>
+            <a:ext cx="3474" cy="3476823"/>
           </a:xfrm>
           <a:prstGeom prst="line">
             <a:avLst/>
@@ -6337,8 +6337,8 @@
         </p:nvSpPr>
         <p:spPr>
           <a:xfrm>
-            <a:off x="2617714" y="1406582"/>
-            <a:ext cx="3646" cy="3797044"/>
+            <a:off x="2817997" y="1461576"/>
+            <a:ext cx="3474" cy="3476823"/>
           </a:xfrm>
           <a:prstGeom prst="line">
             <a:avLst/>
@@ -6364,8 +6364,8 @@
         </p:nvSpPr>
         <p:spPr>
           <a:xfrm>
-            <a:off x="4951053" y="1406582"/>
-            <a:ext cx="3646" cy="3797044"/>
+            <a:off x="5014935" y="1461576"/>
+            <a:ext cx="3474" cy="3476823"/>
           </a:xfrm>
           <a:prstGeom prst="line">
             <a:avLst/>
@@ -6391,8 +6391,8 @@
         </p:nvSpPr>
         <p:spPr>
           <a:xfrm>
-            <a:off x="7335434" y="1406582"/>
-            <a:ext cx="3646" cy="3797044"/>
+            <a:off x="7259970" y="1461576"/>
+            <a:ext cx="3474" cy="3476823"/>
           </a:xfrm>
           <a:prstGeom prst="line">
             <a:avLst/>
@@ -6418,8 +6418,8 @@
         </p:nvSpPr>
         <p:spPr>
           <a:xfrm>
-            <a:off x="9617731" y="1406582"/>
-            <a:ext cx="3646" cy="3797044"/>
+            <a:off x="9408901" y="1461576"/>
+            <a:ext cx="3474" cy="3476823"/>
           </a:xfrm>
           <a:prstGeom prst="line">
             <a:avLst/>
@@ -6445,8 +6445,8 @@
         </p:nvSpPr>
         <p:spPr>
           <a:xfrm>
-            <a:off x="11943778" y="1406582"/>
-            <a:ext cx="3646" cy="3797044"/>
+            <a:off x="11598981" y="1461576"/>
+            <a:ext cx="3474" cy="3476823"/>
           </a:xfrm>
           <a:prstGeom prst="line">
             <a:avLst/>
@@ -6472,8 +6472,8 @@
         </p:nvSpPr>
         <p:spPr>
           <a:xfrm>
-            <a:off x="255209" y="1406582"/>
-            <a:ext cx="11688569" cy="3644"/>
+            <a:off x="593628" y="1461576"/>
+            <a:ext cx="11005352" cy="3291"/>
           </a:xfrm>
           <a:prstGeom prst="line">
             <a:avLst/>
@@ -6499,8 +6499,8 @@
         </p:nvSpPr>
         <p:spPr>
           <a:xfrm>
-            <a:off x="255209" y="2164533"/>
-            <a:ext cx="11688569" cy="3644"/>
+            <a:off x="593628" y="2155606"/>
+            <a:ext cx="11005352" cy="3291"/>
           </a:xfrm>
           <a:prstGeom prst="line">
             <a:avLst/>
@@ -6526,8 +6526,8 @@
         </p:nvSpPr>
         <p:spPr>
           <a:xfrm>
-            <a:off x="255209" y="3162988"/>
-            <a:ext cx="11688569" cy="3644"/>
+            <a:off x="593628" y="3069823"/>
+            <a:ext cx="11005352" cy="3291"/>
           </a:xfrm>
           <a:prstGeom prst="line">
             <a:avLst/>
@@ -6553,8 +6553,8 @@
         </p:nvSpPr>
         <p:spPr>
           <a:xfrm>
-            <a:off x="255209" y="4190595"/>
-            <a:ext cx="11688569" cy="3644"/>
+            <a:off x="593628" y="4010832"/>
+            <a:ext cx="11005352" cy="3291"/>
           </a:xfrm>
           <a:prstGeom prst="line">
             <a:avLst/>
@@ -6580,8 +6580,8 @@
         </p:nvSpPr>
         <p:spPr>
           <a:xfrm>
-            <a:off x="255209" y="5203626"/>
-            <a:ext cx="11688569" cy="3644"/>
+            <a:off x="593628" y="4938400"/>
+            <a:ext cx="11005352" cy="3291"/>
           </a:xfrm>
           <a:prstGeom prst="line">
             <a:avLst/>
@@ -6607,8 +6607,8 @@
         </p:nvSpPr>
         <p:spPr>
           <a:xfrm>
-            <a:off x="328126" y="1530478"/>
-            <a:ext cx="2216672" cy="539311"/>
+            <a:off x="662208" y="1575054"/>
+            <a:ext cx="2087118" cy="493867"/>
           </a:xfrm>
           <a:prstGeom prst="rect">
             <a:avLst/>
@@ -6644,8 +6644,8 @@
         </p:nvSpPr>
         <p:spPr>
           <a:xfrm>
-            <a:off x="2690631" y="1530478"/>
-            <a:ext cx="2187505" cy="539311"/>
+            <a:off x="2886669" y="1575054"/>
+            <a:ext cx="2059686" cy="493867"/>
           </a:xfrm>
           <a:prstGeom prst="rect">
             <a:avLst/>
@@ -6681,8 +6681,8 @@
         </p:nvSpPr>
         <p:spPr>
           <a:xfrm>
-            <a:off x="5023970" y="1530478"/>
-            <a:ext cx="2238547" cy="539311"/>
+            <a:off x="5083606" y="1575054"/>
+            <a:ext cx="2107692" cy="493867"/>
           </a:xfrm>
           <a:prstGeom prst="rect">
             <a:avLst/>
@@ -6718,8 +6718,8 @@
         </p:nvSpPr>
         <p:spPr>
           <a:xfrm>
-            <a:off x="7408351" y="1530478"/>
-            <a:ext cx="2136463" cy="539311"/>
+            <a:off x="7328641" y="1575054"/>
+            <a:ext cx="2011588" cy="493867"/>
           </a:xfrm>
           <a:prstGeom prst="rect">
             <a:avLst/>
@@ -6755,8 +6755,8 @@
         </p:nvSpPr>
         <p:spPr>
           <a:xfrm>
-            <a:off x="9690648" y="1530478"/>
-            <a:ext cx="2180213" cy="539311"/>
+            <a:off x="9477481" y="1575054"/>
+            <a:ext cx="2052736" cy="493867"/>
           </a:xfrm>
           <a:prstGeom prst="rect">
             <a:avLst/>
@@ -6792,8 +6792,8 @@
         </p:nvSpPr>
         <p:spPr>
           <a:xfrm>
-            <a:off x="452084" y="2310293"/>
-            <a:ext cx="2019796" cy="706935"/>
+            <a:off x="778977" y="2289108"/>
+            <a:ext cx="1901769" cy="647303"/>
           </a:xfrm>
           <a:prstGeom prst="rect">
             <a:avLst/>
@@ -6829,8 +6829,8 @@
         </p:nvSpPr>
         <p:spPr>
           <a:xfrm>
-            <a:off x="2814590" y="2310293"/>
-            <a:ext cx="1990630" cy="706935"/>
+            <a:off x="3003346" y="2289108"/>
+            <a:ext cx="1874245" cy="647303"/>
           </a:xfrm>
           <a:prstGeom prst="rect">
             <a:avLst/>
@@ -6866,8 +6866,8 @@
         </p:nvSpPr>
         <p:spPr>
           <a:xfrm>
-            <a:off x="5147929" y="2310293"/>
-            <a:ext cx="2041671" cy="706935"/>
+            <a:off x="5200284" y="2289108"/>
+            <a:ext cx="1922343" cy="647303"/>
           </a:xfrm>
           <a:prstGeom prst="rect">
             <a:avLst/>
@@ -6903,8 +6903,8 @@
         </p:nvSpPr>
         <p:spPr>
           <a:xfrm>
-            <a:off x="7532309" y="2310293"/>
-            <a:ext cx="1939588" cy="706935"/>
+            <a:off x="7445319" y="2289108"/>
+            <a:ext cx="1826239" cy="647303"/>
           </a:xfrm>
           <a:prstGeom prst="rect">
             <a:avLst/>
@@ -6940,8 +6940,8 @@
         </p:nvSpPr>
         <p:spPr>
           <a:xfrm>
-            <a:off x="9814606" y="2310293"/>
-            <a:ext cx="1983338" cy="706935"/>
+            <a:off x="9594250" y="2289108"/>
+            <a:ext cx="1867387" cy="647303"/>
           </a:xfrm>
           <a:prstGeom prst="rect">
             <a:avLst/>
@@ -6977,8 +6977,8 @@
         </p:nvSpPr>
         <p:spPr>
           <a:xfrm>
-            <a:off x="452084" y="3308748"/>
-            <a:ext cx="2019796" cy="736087"/>
+            <a:off x="778977" y="3203326"/>
+            <a:ext cx="1901769" cy="674004"/>
           </a:xfrm>
           <a:prstGeom prst="rect">
             <a:avLst/>
@@ -7014,8 +7014,8 @@
         </p:nvSpPr>
         <p:spPr>
           <a:xfrm>
-            <a:off x="2814590" y="3308748"/>
-            <a:ext cx="1990630" cy="736087"/>
+            <a:off x="3003346" y="3203326"/>
+            <a:ext cx="1874245" cy="674004"/>
           </a:xfrm>
           <a:prstGeom prst="rect">
             <a:avLst/>
@@ -7051,8 +7051,8 @@
         </p:nvSpPr>
         <p:spPr>
           <a:xfrm>
-            <a:off x="5147929" y="3308748"/>
-            <a:ext cx="2041671" cy="736087"/>
+            <a:off x="5200284" y="3203326"/>
+            <a:ext cx="1922343" cy="674004"/>
           </a:xfrm>
           <a:prstGeom prst="rect">
             <a:avLst/>
@@ -7088,8 +7088,8 @@
         </p:nvSpPr>
         <p:spPr>
           <a:xfrm>
-            <a:off x="7532309" y="3308748"/>
-            <a:ext cx="1939588" cy="736087"/>
+            <a:off x="7445319" y="3203326"/>
+            <a:ext cx="1826239" cy="674004"/>
           </a:xfrm>
           <a:prstGeom prst="rect">
             <a:avLst/>
@@ -7125,8 +7125,8 @@
         </p:nvSpPr>
         <p:spPr>
           <a:xfrm>
-            <a:off x="9814606" y="3308748"/>
-            <a:ext cx="1983338" cy="736087"/>
+            <a:off x="9594250" y="3203326"/>
+            <a:ext cx="1867387" cy="674004"/>
           </a:xfrm>
           <a:prstGeom prst="rect">
             <a:avLst/>
@@ -7162,8 +7162,8 @@
         </p:nvSpPr>
         <p:spPr>
           <a:xfrm>
-            <a:off x="452084" y="4336355"/>
-            <a:ext cx="2019796" cy="721511"/>
+            <a:off x="778977" y="4144243"/>
+            <a:ext cx="1901769" cy="660654"/>
           </a:xfrm>
           <a:prstGeom prst="rect">
             <a:avLst/>
@@ -7199,8 +7199,8 @@
         </p:nvSpPr>
         <p:spPr>
           <a:xfrm>
-            <a:off x="2814590" y="4336355"/>
-            <a:ext cx="1990630" cy="721511"/>
+            <a:off x="3003346" y="4144243"/>
+            <a:ext cx="1874245" cy="660654"/>
           </a:xfrm>
           <a:prstGeom prst="rect">
             <a:avLst/>
@@ -7236,8 +7236,8 @@
         </p:nvSpPr>
         <p:spPr>
           <a:xfrm>
-            <a:off x="5147929" y="4336355"/>
-            <a:ext cx="2041671" cy="721511"/>
+            <a:off x="5200284" y="4144243"/>
+            <a:ext cx="1922343" cy="660654"/>
           </a:xfrm>
           <a:prstGeom prst="rect">
             <a:avLst/>
@@ -7273,8 +7273,8 @@
         </p:nvSpPr>
         <p:spPr>
           <a:xfrm>
-            <a:off x="7532309" y="4336355"/>
-            <a:ext cx="1939588" cy="721511"/>
+            <a:off x="7445319" y="4144243"/>
+            <a:ext cx="1826239" cy="660654"/>
           </a:xfrm>
           <a:prstGeom prst="rect">
             <a:avLst/>
@@ -7310,8 +7310,8 @@
         </p:nvSpPr>
         <p:spPr>
           <a:xfrm>
-            <a:off x="9814606" y="4336355"/>
-            <a:ext cx="1983338" cy="721511"/>
+            <a:off x="9594250" y="4144243"/>
+            <a:ext cx="1867387" cy="660654"/>
           </a:xfrm>
           <a:prstGeom prst="rect">
             <a:avLst/>
@@ -7347,7 +7347,7 @@
         </p:nvSpPr>
         <p:spPr>
           <a:xfrm>
-            <a:off x="342709" y="5342098"/>
+            <a:off x="685800" y="5120640"/>
             <a:ext cx="10572941" cy="291520"/>
           </a:xfrm>
           <a:prstGeom prst="rect">
@@ -7364,7 +7364,7 @@
               <a:buNone/>
             </a:pPr>
             <a:r>
-              <a:rPr sz="1500">
+              <a:rPr sz="1600">
                 <a:solidFill>
                   <a:srgbClr val="161616"/>
                 </a:solidFill>
@@ -7384,7 +7384,7 @@
         </p:nvSpPr>
         <p:spPr>
           <a:xfrm>
-            <a:off x="342709" y="5691921"/>
+            <a:off x="685800" y="5486400"/>
             <a:ext cx="10718775" cy="291520"/>
           </a:xfrm>
           <a:prstGeom prst="rect">
@@ -7401,7 +7401,7 @@
               <a:buNone/>
             </a:pPr>
             <a:r>
-              <a:rPr sz="1500">
+              <a:rPr sz="1600">
                 <a:solidFill>
                   <a:srgbClr val="161616"/>
                 </a:solidFill>
@@ -7421,8 +7421,8 @@
         </p:nvSpPr>
         <p:spPr>
           <a:xfrm>
-            <a:off x="255209" y="6187505"/>
-            <a:ext cx="11695861" cy="3644"/>
+            <a:off x="594360" y="5916168"/>
+            <a:ext cx="11000232" cy="914"/>
           </a:xfrm>
           <a:prstGeom prst="line">
             <a:avLst/>
@@ -7448,8 +7448,8 @@
         </p:nvSpPr>
         <p:spPr>
           <a:xfrm>
-            <a:off x="255209" y="6289537"/>
-            <a:ext cx="8677104" cy="393552"/>
+            <a:off x="594360" y="5989320"/>
+            <a:ext cx="10972800" cy="384048"/>
           </a:xfrm>
           <a:prstGeom prst="rect">
             <a:avLst/>
@@ -7465,7 +7465,7 @@
               <a:buNone/>
             </a:pPr>
             <a:r>
-              <a:rPr b="1" sz="2400">
+              <a:rPr b="1" sz="2200">
                 <a:solidFill>
                   <a:srgbClr val="9A5A2E"/>
                 </a:solidFill>
@@ -7485,8 +7485,8 @@
         </p:nvSpPr>
         <p:spPr>
           <a:xfrm>
-            <a:off x="9318772" y="6457160"/>
-            <a:ext cx="2661465" cy="233216"/>
+            <a:off x="594360" y="6492240"/>
+            <a:ext cx="10972800" cy="274320"/>
           </a:xfrm>
           <a:prstGeom prst="rect">
             <a:avLst/>
@@ -7502,7 +7502,7 @@
               <a:buNone/>
             </a:pPr>
             <a:r>
-              <a:rPr sz="1000">
+              <a:rPr sz="1400">
                 <a:solidFill>
                   <a:srgbClr val="161616"/>
                 </a:solidFill>
@@ -8684,7 +8684,7 @@
         </p:nvSpPr>
         <p:spPr>
           <a:xfrm>
-            <a:off x="364584" y="5633617"/>
+            <a:off x="365760" y="5596128"/>
             <a:ext cx="11229193" cy="291520"/>
           </a:xfrm>
           <a:prstGeom prst="rect">
@@ -8721,8 +8721,8 @@
         </p:nvSpPr>
         <p:spPr>
           <a:xfrm>
-            <a:off x="357293" y="6085473"/>
-            <a:ext cx="11484402" cy="3644"/>
+            <a:off x="594360" y="5916168"/>
+            <a:ext cx="11000232" cy="914"/>
           </a:xfrm>
           <a:prstGeom prst="line">
             <a:avLst/>
@@ -8748,8 +8748,8 @@
         </p:nvSpPr>
         <p:spPr>
           <a:xfrm>
-            <a:off x="2916673" y="6187505"/>
-            <a:ext cx="6365640" cy="422704"/>
+            <a:off x="594360" y="5989320"/>
+            <a:ext cx="10972800" cy="384048"/>
           </a:xfrm>
           <a:prstGeom prst="rect">
             <a:avLst/>
@@ -8765,7 +8765,7 @@
               <a:buNone/>
             </a:pPr>
             <a:r>
-              <a:rPr b="1" sz="2400">
+              <a:rPr b="1" sz="2200">
                 <a:solidFill>
                   <a:srgbClr val="9A5A2E"/>
                 </a:solidFill>
@@ -8785,8 +8785,8 @@
         </p:nvSpPr>
         <p:spPr>
           <a:xfrm>
-            <a:off x="9391689" y="6515464"/>
-            <a:ext cx="2471881" cy="196776"/>
+            <a:off x="594360" y="6492240"/>
+            <a:ext cx="10972800" cy="274320"/>
           </a:xfrm>
           <a:prstGeom prst="rect">
             <a:avLst/>
@@ -8802,7 +8802,7 @@
               <a:buNone/>
             </a:pPr>
             <a:r>
-              <a:rPr sz="800">
+              <a:rPr sz="1400">
                 <a:solidFill>
                   <a:srgbClr val="161616"/>
                 </a:solidFill>
@@ -9796,8 +9796,8 @@
         </p:nvSpPr>
         <p:spPr>
           <a:xfrm>
-            <a:off x="371876" y="5910561"/>
-            <a:ext cx="11447943" cy="3644"/>
+            <a:off x="594360" y="5916168"/>
+            <a:ext cx="11000232" cy="914"/>
           </a:xfrm>
           <a:prstGeom prst="line">
             <a:avLst/>
@@ -9823,8 +9823,8 @@
         </p:nvSpPr>
         <p:spPr>
           <a:xfrm>
-            <a:off x="371876" y="6041745"/>
-            <a:ext cx="9114605" cy="546599"/>
+            <a:off x="594360" y="5989320"/>
+            <a:ext cx="10972800" cy="384048"/>
           </a:xfrm>
           <a:prstGeom prst="rect">
             <a:avLst/>
@@ -9840,7 +9840,7 @@
               <a:buNone/>
             </a:pPr>
             <a:r>
-              <a:rPr b="1" sz="2900">
+              <a:rPr b="1" sz="2200">
                 <a:solidFill>
                   <a:srgbClr val="9A5A2E"/>
                 </a:solidFill>
@@ -9860,8 +9860,8 @@
         </p:nvSpPr>
         <p:spPr>
           <a:xfrm>
-            <a:off x="9479189" y="6376993"/>
-            <a:ext cx="2406256" cy="211352"/>
+            <a:off x="594360" y="6492240"/>
+            <a:ext cx="10972800" cy="274320"/>
           </a:xfrm>
           <a:prstGeom prst="rect">
             <a:avLst/>
@@ -9877,7 +9877,7 @@
               <a:buNone/>
             </a:pPr>
             <a:r>
-              <a:rPr sz="900">
+              <a:rPr sz="1400">
                 <a:solidFill>
                   <a:srgbClr val="161616"/>
                 </a:solidFill>
